--- a/index/designs/y7-l12/l1-transport-modes/l1-transport-modes.pptx
+++ b/index/designs/y7-l12/l1-transport-modes/l1-transport-modes.pptx
@@ -1934,15 +1934,6 @@
               </a:rPr>
               <a:t>交通工具</a:t>
             </a:r>
-            <a:pPr algn="ctr" indent="0" marL="0">
-              <a:lnSpc>
-                <a:spcPts val="7040"/>
-              </a:lnSpc>
-              <a:spcBef>
-                <a:spcPts val="800"/>
-              </a:spcBef>
-              <a:buNone/>
-            </a:pPr>
             <a:r>
               <a:rPr lang="en-US" sz="6400" b="1" dirty="0">
                 <a:solidFill>
@@ -4416,12 +4407,6 @@
               </a:rPr>
               <a:t>On whiteboards: write one transport word you're </a:t>
             </a:r>
-            <a:pPr algn="l" indent="0" marL="0">
-              <a:lnSpc>
-                <a:spcPts val="1470"/>
-              </a:lnSpc>
-              <a:buNone/>
-            </a:pPr>
             <a:r>
               <a:rPr lang="en-US" sz="1050" b="1" dirty="0">
                 <a:solidFill>
@@ -4433,12 +4418,6 @@
               </a:rPr>
               <a:t>confident</a:t>
             </a:r>
-            <a:pPr algn="l" indent="0" marL="0">
-              <a:lnSpc>
-                <a:spcPts val="1470"/>
-              </a:lnSpc>
-              <a:buNone/>
-            </a:pPr>
             <a:r>
               <a:rPr lang="en-US" sz="1050" dirty="0">
                 <a:solidFill>
@@ -4450,12 +4429,6 @@
               </a:rPr>
               <a:t> with, and one you're still </a:t>
             </a:r>
-            <a:pPr algn="l" indent="0" marL="0">
-              <a:lnSpc>
-                <a:spcPts val="1470"/>
-              </a:lnSpc>
-              <a:buNone/>
-            </a:pPr>
             <a:r>
               <a:rPr lang="en-US" sz="1050" b="1" dirty="0">
                 <a:solidFill>
@@ -4467,12 +4440,6 @@
               </a:rPr>
               <a:t>learning</a:t>
             </a:r>
-            <a:pPr algn="l" indent="0" marL="0">
-              <a:lnSpc>
-                <a:spcPts val="1470"/>
-              </a:lnSpc>
-              <a:buNone/>
-            </a:pPr>
             <a:r>
               <a:rPr lang="en-US" sz="1050" dirty="0">
                 <a:solidFill>
@@ -4604,12 +4571,6 @@
               </a:rPr>
               <a:t>Write one sentence about how you get to school, using </a:t>
             </a:r>
-            <a:pPr algn="l" indent="0" marL="0">
-              <a:lnSpc>
-                <a:spcPts val="1820"/>
-              </a:lnSpc>
-              <a:buNone/>
-            </a:pPr>
             <a:r>
               <a:rPr lang="en-US" sz="1300" b="1" dirty="0">
                 <a:solidFill>
@@ -4621,12 +4582,6 @@
               </a:rPr>
               <a:t>坐</a:t>
             </a:r>
-            <a:pPr algn="l" indent="0" marL="0">
-              <a:lnSpc>
-                <a:spcPts val="1820"/>
-              </a:lnSpc>
-              <a:buNone/>
-            </a:pPr>
             <a:r>
               <a:rPr lang="en-US" sz="1300" dirty="0">
                 <a:solidFill>
@@ -4638,12 +4593,6 @@
               </a:rPr>
               <a:t> or </a:t>
             </a:r>
-            <a:pPr algn="l" indent="0" marL="0">
-              <a:lnSpc>
-                <a:spcPts val="1820"/>
-              </a:lnSpc>
-              <a:buNone/>
-            </a:pPr>
             <a:r>
               <a:rPr lang="en-US" sz="1300" b="1" dirty="0">
                 <a:solidFill>
@@ -4655,12 +4604,6 @@
               </a:rPr>
               <a:t>走路</a:t>
             </a:r>
-            <a:pPr algn="l" indent="0" marL="0">
-              <a:lnSpc>
-                <a:spcPts val="1820"/>
-              </a:lnSpc>
-              <a:buNone/>
-            </a:pPr>
             <a:r>
               <a:rPr lang="en-US" sz="1300" dirty="0">
                 <a:solidFill>
@@ -5354,15 +5297,6 @@
               </a:rPr>
               <a:t>Today: </a:t>
             </a:r>
-            <a:pPr algn="ctr" indent="0" marL="0">
-              <a:lnSpc>
-                <a:spcPts val="1760"/>
-              </a:lnSpc>
-              <a:spcBef>
-                <a:spcPts val="1400"/>
-              </a:spcBef>
-              <a:buNone/>
-            </a:pPr>
             <a:r>
               <a:rPr lang="en-US" sz="1100" b="1" dirty="0">
                 <a:solidFill>
@@ -5374,15 +5308,6 @@
               </a:rPr>
               <a:t>校车 / 火车 / 电车 / 飞机 / 渡船 / 出租车 / 公共汽车</a:t>
             </a:r>
-            <a:pPr algn="ctr" indent="0" marL="0">
-              <a:lnSpc>
-                <a:spcPts val="1760"/>
-              </a:lnSpc>
-              <a:spcBef>
-                <a:spcPts val="1400"/>
-              </a:spcBef>
-              <a:buNone/>
-            </a:pPr>
             <a:r>
               <a:rPr lang="en-US" sz="1100" dirty="0">
                 <a:solidFill>
@@ -5394,15 +5319,6 @@
               </a:rPr>
               <a:t> + </a:t>
             </a:r>
-            <a:pPr algn="ctr" indent="0" marL="0">
-              <a:lnSpc>
-                <a:spcPts val="1760"/>
-              </a:lnSpc>
-              <a:spcBef>
-                <a:spcPts val="1400"/>
-              </a:spcBef>
-              <a:buNone/>
-            </a:pPr>
             <a:r>
               <a:rPr lang="en-US" sz="1100" b="1" dirty="0">
                 <a:solidFill>
@@ -5414,15 +5330,6 @@
               </a:rPr>
               <a:t>坐 / 走路 / 开车</a:t>
             </a:r>
-            <a:pPr algn="ctr" indent="0" marL="0">
-              <a:lnSpc>
-                <a:spcPts val="1760"/>
-              </a:lnSpc>
-              <a:spcBef>
-                <a:spcPts val="1400"/>
-              </a:spcBef>
-              <a:buNone/>
-            </a:pPr>
             <a:endParaRPr lang="en-US" sz="1100" dirty="0"/>
           </a:p>
           <a:p>
@@ -7611,12 +7518,6 @@
               </a:rPr>
               <a:t>We are learning to name common </a:t>
             </a:r>
-            <a:pPr algn="l" indent="0" marL="0">
-              <a:lnSpc>
-                <a:spcPts val="2100"/>
-              </a:lnSpc>
-              <a:buNone/>
-            </a:pPr>
             <a:r>
               <a:rPr lang="en-US" sz="1500" b="1" dirty="0">
                 <a:solidFill>
@@ -7628,12 +7529,6 @@
               </a:rPr>
               <a:t>modes of transport</a:t>
             </a:r>
-            <a:pPr algn="l" indent="0" marL="0">
-              <a:lnSpc>
-                <a:spcPts val="2100"/>
-              </a:lnSpc>
-              <a:buNone/>
-            </a:pPr>
             <a:r>
               <a:rPr lang="en-US" sz="1500" dirty="0">
                 <a:solidFill>
@@ -7757,9 +7652,6 @@
               </a:rPr>
               <a:t>I can name at least </a:t>
             </a:r>
-            <a:pPr algn="l" indent="0" marL="0">
-              <a:buNone/>
-            </a:pPr>
             <a:r>
               <a:rPr lang="en-US" sz="1400" b="1" dirty="0">
                 <a:solidFill>
@@ -7771,9 +7663,6 @@
               </a:rPr>
               <a:t>6 modes of transport</a:t>
             </a:r>
-            <a:pPr algn="l" indent="0" marL="0">
-              <a:buNone/>
-            </a:pPr>
             <a:r>
               <a:rPr lang="en-US" sz="1400" dirty="0">
                 <a:solidFill>
@@ -7936,9 +7825,6 @@
               </a:rPr>
               <a:t>I can write sentences using </a:t>
             </a:r>
-            <a:pPr algn="l" indent="0" marL="0">
-              <a:buNone/>
-            </a:pPr>
             <a:r>
               <a:rPr lang="en-US" sz="1400" b="1" dirty="0">
                 <a:solidFill>
@@ -7950,9 +7836,6 @@
               </a:rPr>
               <a:t>坐 + vehicle</a:t>
             </a:r>
-            <a:pPr algn="l" indent="0" marL="0">
-              <a:buNone/>
-            </a:pPr>
             <a:r>
               <a:rPr lang="en-US" sz="1400" dirty="0">
                 <a:solidFill>
@@ -7964,9 +7847,6 @@
               </a:rPr>
               <a:t>, and </a:t>
             </a:r>
-            <a:pPr algn="l" indent="0" marL="0">
-              <a:buNone/>
-            </a:pPr>
             <a:r>
               <a:rPr lang="en-US" sz="1400" b="1" dirty="0">
                 <a:solidFill>
@@ -7978,9 +7858,6 @@
               </a:rPr>
               <a:t>走路 / 开车</a:t>
             </a:r>
-            <a:pPr algn="l" indent="0" marL="0">
-              <a:buNone/>
-            </a:pPr>
             <a:r>
               <a:rPr lang="en-US" sz="1400" dirty="0">
                 <a:solidFill>
@@ -8143,9 +8020,6 @@
               </a:rPr>
               <a:t>I can describe how someone in my </a:t>
             </a:r>
-            <a:pPr algn="l" indent="0" marL="0">
-              <a:buNone/>
-            </a:pPr>
             <a:r>
               <a:rPr lang="en-US" sz="1400" b="1" dirty="0">
                 <a:solidFill>
@@ -8157,9 +8031,6 @@
               </a:rPr>
               <a:t>family</a:t>
             </a:r>
-            <a:pPr algn="l" indent="0" marL="0">
-              <a:buNone/>
-            </a:pPr>
             <a:r>
               <a:rPr lang="en-US" sz="1400" dirty="0">
                 <a:solidFill>
@@ -12540,12 +12411,6 @@
               </a:rPr>
               <a:t>每 </a:t>
             </a:r>
-            <a:pPr algn="l" indent="0" marL="0">
-              <a:spcAft>
-                <a:spcPts val="300"/>
-              </a:spcAft>
-              <a:buNone/>
-            </a:pPr>
             <a:r>
               <a:rPr lang="en-US" sz="900" b="1" dirty="0">
                 <a:solidFill>
@@ -12557,12 +12422,6 @@
               </a:rPr>
               <a:t>+</a:t>
             </a:r>
-            <a:pPr algn="l" indent="0" marL="0">
-              <a:spcAft>
-                <a:spcPts val="300"/>
-              </a:spcAft>
-              <a:buNone/>
-            </a:pPr>
             <a:r>
               <a:rPr lang="en-US" sz="1100" dirty="0">
                 <a:solidFill>
@@ -12574,12 +12433,6 @@
               </a:rPr>
               <a:t> time word </a:t>
             </a:r>
-            <a:pPr algn="l" indent="0" marL="0">
-              <a:spcAft>
-                <a:spcPts val="300"/>
-              </a:spcAft>
-              <a:buNone/>
-            </a:pPr>
             <a:r>
               <a:rPr lang="en-US" sz="900" b="1" dirty="0">
                 <a:solidFill>
@@ -12591,12 +12444,6 @@
               </a:rPr>
               <a:t>=</a:t>
             </a:r>
-            <a:pPr algn="l" indent="0" marL="0">
-              <a:spcAft>
-                <a:spcPts val="300"/>
-              </a:spcAft>
-              <a:buNone/>
-            </a:pPr>
             <a:r>
               <a:rPr lang="en-US" sz="1100" dirty="0">
                 <a:solidFill>
@@ -13343,9 +13190,6 @@
               </a:rPr>
               <a:t>坐 </a:t>
             </a:r>
-            <a:pPr algn="l" indent="0" marL="0">
-              <a:buNone/>
-            </a:pPr>
             <a:r>
               <a:rPr lang="en-US" sz="1000" b="1" dirty="0">
                 <a:solidFill>
@@ -13357,9 +13201,6 @@
               </a:rPr>
               <a:t>+</a:t>
             </a:r>
-            <a:pPr algn="l" indent="0" marL="0">
-              <a:buNone/>
-            </a:pPr>
             <a:r>
               <a:rPr lang="en-US" sz="1200" dirty="0">
                 <a:solidFill>
@@ -13371,9 +13212,6 @@
               </a:rPr>
               <a:t> vehicle </a:t>
             </a:r>
-            <a:pPr algn="l" indent="0" marL="0">
-              <a:buNone/>
-            </a:pPr>
             <a:r>
               <a:rPr lang="en-US" sz="1000" b="1" dirty="0">
                 <a:solidFill>
@@ -13385,9 +13223,6 @@
               </a:rPr>
               <a:t>(+</a:t>
             </a:r>
-            <a:pPr algn="l" indent="0" marL="0">
-              <a:buNone/>
-            </a:pPr>
             <a:r>
               <a:rPr lang="en-US" sz="1200" dirty="0">
                 <a:solidFill>
@@ -13399,9 +13234,6 @@
               </a:rPr>
               <a:t> activity</a:t>
             </a:r>
-            <a:pPr algn="l" indent="0" marL="0">
-              <a:buNone/>
-            </a:pPr>
             <a:r>
               <a:rPr lang="en-US" sz="1000" b="1" dirty="0">
                 <a:solidFill>
@@ -13452,9 +13284,6 @@
               </a:rPr>
               <a:t>e.g. </a:t>
             </a:r>
-            <a:pPr algn="l" indent="0" marL="0">
-              <a:buNone/>
-            </a:pPr>
             <a:r>
               <a:rPr lang="en-US" sz="1050" b="1" dirty="0">
                 <a:solidFill>
@@ -13466,9 +13295,6 @@
               </a:rPr>
               <a:t>坐校车上学</a:t>
             </a:r>
-            <a:pPr algn="l" indent="0" marL="0">
-              <a:buNone/>
-            </a:pPr>
             <a:r>
               <a:rPr lang="en-US" sz="1050" dirty="0">
                 <a:solidFill>
@@ -13480,9 +13306,6 @@
               </a:rPr>
               <a:t> · </a:t>
             </a:r>
-            <a:pPr algn="l" indent="0" marL="0">
-              <a:buNone/>
-            </a:pPr>
             <a:r>
               <a:rPr lang="en-US" sz="1050" b="1" dirty="0">
                 <a:solidFill>
@@ -13565,9 +13388,6 @@
               </a:rPr>
               <a:t>走路 </a:t>
             </a:r>
-            <a:pPr algn="l" indent="0" marL="0">
-              <a:buNone/>
-            </a:pPr>
             <a:r>
               <a:rPr lang="en-US" sz="1000" b="1" dirty="0">
                 <a:solidFill>
@@ -13579,9 +13399,6 @@
               </a:rPr>
               <a:t>=</a:t>
             </a:r>
-            <a:pPr algn="l" indent="0" marL="0">
-              <a:buNone/>
-            </a:pPr>
             <a:r>
               <a:rPr lang="en-US" sz="1200" dirty="0">
                 <a:solidFill>
@@ -13632,9 +13449,6 @@
               </a:rPr>
               <a:t>no 坐 needed — </a:t>
             </a:r>
-            <a:pPr algn="l" indent="0" marL="0">
-              <a:buNone/>
-            </a:pPr>
             <a:r>
               <a:rPr lang="en-US" sz="1050" b="1" dirty="0">
                 <a:solidFill>
@@ -13717,9 +13531,6 @@
               </a:rPr>
               <a:t>开车 </a:t>
             </a:r>
-            <a:pPr algn="l" indent="0" marL="0">
-              <a:buNone/>
-            </a:pPr>
             <a:r>
               <a:rPr lang="en-US" sz="1000" b="1" dirty="0">
                 <a:solidFill>
@@ -13731,9 +13542,6 @@
               </a:rPr>
               <a:t>=</a:t>
             </a:r>
-            <a:pPr algn="l" indent="0" marL="0">
-              <a:buNone/>
-            </a:pPr>
             <a:r>
               <a:rPr lang="en-US" sz="1200" dirty="0">
                 <a:solidFill>
@@ -14493,9 +14301,6 @@
               </a:rPr>
               <a:t>Do we say 「坐走路」, or just 「走路」? </a:t>
             </a:r>
-            <a:pPr algn="l" indent="0" marL="0">
-              <a:buNone/>
-            </a:pPr>
             <a:r>
               <a:rPr lang="en-US" sz="1200" b="1" dirty="0">
                 <a:solidFill>
@@ -15704,12 +15509,6 @@
               </a:rPr>
               <a:t>Q2 — 坐走路 or 走路?</a:t>
             </a:r>
-            <a:pPr algn="l" indent="0" marL="0">
-              <a:lnSpc>
-                <a:spcPts val="1500"/>
-              </a:lnSpc>
-              <a:buNone/>
-            </a:pPr>
             <a:endParaRPr lang="en-US" sz="1000" dirty="0"/>
           </a:p>
           <a:p>
@@ -18327,9 +18126,6 @@
               </a:rPr>
               <a:t>我 </a:t>
             </a:r>
-            <a:pPr algn="l" indent="0" marL="0">
-              <a:buNone/>
-            </a:pPr>
             <a:r>
               <a:rPr lang="en-US" sz="1200" b="1" dirty="0">
                 <a:solidFill>
@@ -18341,9 +18137,6 @@
               </a:rPr>
               <a:t>___</a:t>
             </a:r>
-            <a:pPr algn="l" indent="0" marL="0">
-              <a:buNone/>
-            </a:pPr>
             <a:r>
               <a:rPr lang="en-US" sz="1200" dirty="0">
                 <a:solidFill>
@@ -18355,9 +18148,6 @@
               </a:rPr>
               <a:t>（家人）</a:t>
             </a:r>
-            <a:pPr algn="l" indent="0" marL="0">
-              <a:buNone/>
-            </a:pPr>
             <a:r>
               <a:rPr lang="en-US" sz="1200" b="1" dirty="0">
                 <a:solidFill>
@@ -18369,9 +18159,6 @@
               </a:rPr>
               <a:t>___</a:t>
             </a:r>
-            <a:pPr algn="l" indent="0" marL="0">
-              <a:buNone/>
-            </a:pPr>
             <a:r>
               <a:rPr lang="en-US" sz="1200" dirty="0">
                 <a:solidFill>
@@ -18383,9 +18170,6 @@
               </a:rPr>
               <a:t>（坐+vehicle / 走路 / 开车）</a:t>
             </a:r>
-            <a:pPr algn="l" indent="0" marL="0">
-              <a:buNone/>
-            </a:pPr>
             <a:r>
               <a:rPr lang="en-US" sz="1200" b="1" dirty="0">
                 <a:solidFill>
@@ -18397,9 +18181,6 @@
               </a:rPr>
               <a:t>___</a:t>
             </a:r>
-            <a:pPr algn="l" indent="0" marL="0">
-              <a:buNone/>
-            </a:pPr>
             <a:r>
               <a:rPr lang="en-US" sz="1200" dirty="0">
                 <a:solidFill>
@@ -18411,9 +18192,6 @@
               </a:rPr>
               <a:t>（上班/上学）。 </a:t>
             </a:r>
-            <a:pPr algn="l" indent="0" marL="0">
-              <a:buNone/>
-            </a:pPr>
             <a:r>
               <a:rPr lang="en-US" sz="800" dirty="0">
                 <a:solidFill>
@@ -18929,9 +18707,6 @@
               </a:rPr>
               <a:t>➕ Then write </a:t>
             </a:r>
-            <a:pPr algn="l" indent="0" marL="0">
-              <a:buNone/>
-            </a:pPr>
             <a:r>
               <a:rPr lang="en-US" sz="900" b="1" dirty="0">
                 <a:solidFill>
@@ -18943,9 +18718,6 @@
               </a:rPr>
               <a:t>2 original sentences</a:t>
             </a:r>
-            <a:pPr algn="l" indent="0" marL="0">
-              <a:buNone/>
-            </a:pPr>
             <a:r>
               <a:rPr lang="en-US" sz="900" dirty="0">
                 <a:solidFill>
@@ -19091,9 +18863,6 @@
               </a:rPr>
               <a:t>Cold call pairs: ask &amp; answer one of the 3 yes/no questions about family commute — e.g. </a:t>
             </a:r>
-            <a:pPr algn="l" indent="0" marL="0">
-              <a:buNone/>
-            </a:pPr>
             <a:r>
               <a:rPr lang="en-US" sz="950" b="1" dirty="0">
                 <a:solidFill>
